--- a/formats/talk/trust-but-verify-for-family-printer-friendly.pptx
+++ b/formats/talk/trust-but-verify-for-family-printer-friendly.pptx
@@ -3057,7 +3057,7 @@
                 <a:ea typeface="Arial" pitchFamily="34" charset="-122"/>
                 <a:cs typeface="Arial" pitchFamily="34" charset="-120"/>
               </a:rPr>
-              <a:t>Free. Licensed CC BY. No sponsors, no data collected. Take it, change it — just keep a credit line back to us.</a:t>
+              <a:t>Free, CC BY-NC — fine for nursing homes and senior centers. Credit us; don't resell it.</a:t>
             </a:r>
             <a:endParaRPr lang="en-US" sz="1300" dirty="0"/>
           </a:p>
